--- a/figures/architectureFigure.pptx
+++ b/figures/architectureFigure.pptx
@@ -199,7 +199,7 @@
           <a:p>
             <a:fld id="{09AD4D1A-E085-4301-B8FE-3ACA6372602D}" type="datetimeFigureOut">
               <a:rPr lang="en-US" smtClean="0"/>
-              <a:t>10/11/2026</a:t>
+              <a:t>10/12/2026</a:t>
             </a:fld>
             <a:endParaRPr lang="en-US"/>
           </a:p>
@@ -921,7 +921,7 @@
           <a:p>
             <a:fld id="{930E4D5B-009F-4499-B66B-E386A51B4BA4}" type="datetimeFigureOut">
               <a:rPr lang="en-US" smtClean="0"/>
-              <a:t>10/11/2026</a:t>
+              <a:t>10/12/2026</a:t>
             </a:fld>
             <a:endParaRPr lang="en-US"/>
           </a:p>
@@ -1091,7 +1091,7 @@
           <a:p>
             <a:fld id="{930E4D5B-009F-4499-B66B-E386A51B4BA4}" type="datetimeFigureOut">
               <a:rPr lang="en-US" smtClean="0"/>
-              <a:t>10/11/2026</a:t>
+              <a:t>10/12/2026</a:t>
             </a:fld>
             <a:endParaRPr lang="en-US"/>
           </a:p>
@@ -1271,7 +1271,7 @@
           <a:p>
             <a:fld id="{930E4D5B-009F-4499-B66B-E386A51B4BA4}" type="datetimeFigureOut">
               <a:rPr lang="en-US" smtClean="0"/>
-              <a:t>10/11/2026</a:t>
+              <a:t>10/12/2026</a:t>
             </a:fld>
             <a:endParaRPr lang="en-US"/>
           </a:p>
@@ -1441,7 +1441,7 @@
           <a:p>
             <a:fld id="{930E4D5B-009F-4499-B66B-E386A51B4BA4}" type="datetimeFigureOut">
               <a:rPr lang="en-US" smtClean="0"/>
-              <a:t>10/11/2026</a:t>
+              <a:t>10/12/2026</a:t>
             </a:fld>
             <a:endParaRPr lang="en-US"/>
           </a:p>
@@ -1687,7 +1687,7 @@
           <a:p>
             <a:fld id="{930E4D5B-009F-4499-B66B-E386A51B4BA4}" type="datetimeFigureOut">
               <a:rPr lang="en-US" smtClean="0"/>
-              <a:t>10/11/2026</a:t>
+              <a:t>10/12/2026</a:t>
             </a:fld>
             <a:endParaRPr lang="en-US"/>
           </a:p>
@@ -1919,7 +1919,7 @@
           <a:p>
             <a:fld id="{930E4D5B-009F-4499-B66B-E386A51B4BA4}" type="datetimeFigureOut">
               <a:rPr lang="en-US" smtClean="0"/>
-              <a:t>10/11/2026</a:t>
+              <a:t>10/12/2026</a:t>
             </a:fld>
             <a:endParaRPr lang="en-US"/>
           </a:p>
@@ -2286,7 +2286,7 @@
           <a:p>
             <a:fld id="{930E4D5B-009F-4499-B66B-E386A51B4BA4}" type="datetimeFigureOut">
               <a:rPr lang="en-US" smtClean="0"/>
-              <a:t>10/11/2026</a:t>
+              <a:t>10/12/2026</a:t>
             </a:fld>
             <a:endParaRPr lang="en-US"/>
           </a:p>
@@ -2404,7 +2404,7 @@
           <a:p>
             <a:fld id="{930E4D5B-009F-4499-B66B-E386A51B4BA4}" type="datetimeFigureOut">
               <a:rPr lang="en-US" smtClean="0"/>
-              <a:t>10/11/2026</a:t>
+              <a:t>10/12/2026</a:t>
             </a:fld>
             <a:endParaRPr lang="en-US"/>
           </a:p>
@@ -2499,7 +2499,7 @@
           <a:p>
             <a:fld id="{930E4D5B-009F-4499-B66B-E386A51B4BA4}" type="datetimeFigureOut">
               <a:rPr lang="en-US" smtClean="0"/>
-              <a:t>10/11/2026</a:t>
+              <a:t>10/12/2026</a:t>
             </a:fld>
             <a:endParaRPr lang="en-US"/>
           </a:p>
@@ -2776,7 +2776,7 @@
           <a:p>
             <a:fld id="{930E4D5B-009F-4499-B66B-E386A51B4BA4}" type="datetimeFigureOut">
               <a:rPr lang="en-US" smtClean="0"/>
-              <a:t>10/11/2026</a:t>
+              <a:t>10/12/2026</a:t>
             </a:fld>
             <a:endParaRPr lang="en-US"/>
           </a:p>
@@ -3033,7 +3033,7 @@
           <a:p>
             <a:fld id="{930E4D5B-009F-4499-B66B-E386A51B4BA4}" type="datetimeFigureOut">
               <a:rPr lang="en-US" smtClean="0"/>
-              <a:t>10/11/2026</a:t>
+              <a:t>10/12/2026</a:t>
             </a:fld>
             <a:endParaRPr lang="en-US"/>
           </a:p>
@@ -3246,7 +3246,7 @@
           <a:p>
             <a:fld id="{930E4D5B-009F-4499-B66B-E386A51B4BA4}" type="datetimeFigureOut">
               <a:rPr lang="en-US" smtClean="0"/>
-              <a:t>10/11/2026</a:t>
+              <a:t>10/12/2026</a:t>
             </a:fld>
             <a:endParaRPr lang="en-US"/>
           </a:p>
@@ -6407,7 +6407,7 @@
         </p:blipFill>
         <p:spPr>
           <a:xfrm>
-            <a:off x="3752248" y="5586930"/>
+            <a:off x="3609027" y="5476760"/>
             <a:ext cx="914400" cy="914400"/>
           </a:xfrm>
           <a:prstGeom prst="rect">
